--- a/curriculum/M01/W04/L03/slides-2.pptx
+++ b/curriculum/M01/W04/L03/slides-2.pptx
@@ -8172,11 +8172,40 @@
                 <a:ea typeface="Malgun Gothic"/>
                 <a:cs typeface="Malgun Gothic"/>
               </a:rPr>
-              <a:t> 그 가족이 소인 분포에서 오른쪽에 있다는 뜻이기 때문이다. 2. </a:t>
-            </a:r>
+              <a:t> 그 가족이 소인 분포에서 오른쪽에 있다는 뜻이기 때문이다.</a:t>
+            </a:r>
+          </a:p>
+          <a:p>
+            <a:pPr>
+              <a:spcAft>
+                <a:spcPts val="900"/>
+              </a:spcAft>
+            </a:pPr>
             <a:r>
               <a:rPr sz="1400" b="1" i="0">
                 <a:solidFill>
+                  <a:srgbClr val="F2B705"/>
+                </a:solidFill>
+                <a:latin typeface="Malgun Gothic"/>
+                <a:ea typeface="Malgun Gothic"/>
+                <a:cs typeface="Malgun Gothic"/>
+              </a:rPr>
+              <a:t>•  </a:t>
+            </a:r>
+            <a:r>
+              <a:rPr sz="1400" b="0" i="0">
+                <a:solidFill>
+                  <a:srgbClr val="11202B"/>
+                </a:solidFill>
+                <a:latin typeface="Malgun Gothic"/>
+                <a:ea typeface="Malgun Gothic"/>
+                <a:cs typeface="Malgun Gothic"/>
+              </a:rPr>
+              <a:t>2. </a:t>
+            </a:r>
+            <a:r>
+              <a:rPr sz="1400" b="1" i="0">
+                <a:solidFill>
                   <a:srgbClr val="11202B"/>
                 </a:solidFill>
                 <a:latin typeface="Malgun Gothic"/>
@@ -8194,7 +8223,36 @@
                 <a:ea typeface="Malgun Gothic"/>
                 <a:cs typeface="Malgun Gothic"/>
               </a:rPr>
-              <a:t> 더 멀리 역치를 넘었다는 뜻이다. 3. </a:t>
+              <a:t> 더 멀리 역치를 넘었다는 뜻이다.</a:t>
+            </a:r>
+          </a:p>
+          <a:p>
+            <a:pPr>
+              <a:spcAft>
+                <a:spcPts val="900"/>
+              </a:spcAft>
+            </a:pPr>
+            <a:r>
+              <a:rPr sz="1400" b="1" i="0">
+                <a:solidFill>
+                  <a:srgbClr val="F2B705"/>
+                </a:solidFill>
+                <a:latin typeface="Malgun Gothic"/>
+                <a:ea typeface="Malgun Gothic"/>
+                <a:cs typeface="Malgun Gothic"/>
+              </a:rPr>
+              <a:t>•  </a:t>
+            </a:r>
+            <a:r>
+              <a:rPr sz="1400" b="0" i="0">
+                <a:solidFill>
+                  <a:srgbClr val="11202B"/>
+                </a:solidFill>
+                <a:latin typeface="Malgun Gothic"/>
+                <a:ea typeface="Malgun Gothic"/>
+                <a:cs typeface="Malgun Gothic"/>
+              </a:rPr>
+              <a:t>3. </a:t>
             </a:r>
             <a:r>
               <a:rPr sz="1400" b="1" i="0">

--- a/curriculum/M01/W04/L03/slides-2.pptx
+++ b/curriculum/M01/W04/L03/slides-2.pptx
@@ -15808,7 +15808,7 @@
                 <a:ea typeface="Malgun Gothic"/>
                 <a:cs typeface="Malgun Gothic"/>
               </a:rPr>
-              <a:t>M01-W02-L03 생식계 요약 — 감수분열, 염색체 비분리, 부모 연령의 효과</a:t>
+              <a:t>M01-W02-L03 생식계 요약: 생식기관·생식세포·호르몬 — 감수분열, 염색체 비분리, 부모 연령의 효과</a:t>
             </a:r>
           </a:p>
           <a:p>
@@ -15837,7 +15837,7 @@
                 <a:ea typeface="Malgun Gothic"/>
                 <a:cs typeface="Malgun Gothic"/>
               </a:rPr>
-              <a:t>M01-W03-L01 발생 요약 — 유전자 발현과 세포 운명</a:t>
+              <a:t>M01-W03-L01 발생 요약: 수정·배엽·기관 형성 — 유전자 발현과 세포 운명</a:t>
             </a:r>
           </a:p>
           <a:p>
@@ -15866,7 +15866,7 @@
                 <a:ea typeface="Malgun Gothic"/>
                 <a:cs typeface="Malgun Gothic"/>
               </a:rPr>
-              <a:t>M01-W05-L03 유전정보의 흐름 — 복제, 전사, 번역의 개요</a:t>
+              <a:t>M01-W05-L03 유전정보의 흐름: 복제·전사·번역 — 복제, 전사, 번역의 개요</a:t>
             </a:r>
           </a:p>
         </p:txBody>

--- a/curriculum/M01/W04/L03/slides-2.pptx
+++ b/curriculum/M01/W04/L03/slides-2.pptx
@@ -6252,7 +6252,7 @@
               </a:spcAft>
             </a:pPr>
             <a:r>
-              <a:rPr sz="1600" b="1" i="0">
+              <a:rPr sz="1400" b="1" i="0">
                 <a:solidFill>
                   <a:srgbClr val="F2B705"/>
                 </a:solidFill>
@@ -6263,15 +6263,37 @@
               <a:t>•  </a:t>
             </a:r>
             <a:r>
-              <a:rPr sz="1600" b="0" i="0">
-                <a:solidFill>
-                  <a:srgbClr val="11202B"/>
-                </a:solidFill>
-                <a:latin typeface="Malgun Gothic"/>
-                <a:ea typeface="Malgun Gothic"/>
-                <a:cs typeface="Malgun Gothic"/>
-              </a:rPr>
-              <a:t>유전학의 주장은 측정 기술의 해상도에 묶여 있다. 어떤 방법이 어떤 크기의 변화를 볼 수 있는지를 알아야 검사 결과를 해석할 수 있다.</a:t>
+              <a:rPr sz="1400" b="0" i="0">
+                <a:solidFill>
+                  <a:srgbClr val="11202B"/>
+                </a:solidFill>
+                <a:latin typeface="Malgun Gothic"/>
+                <a:ea typeface="Malgun Gothic"/>
+                <a:cs typeface="Malgun Gothic"/>
+              </a:rPr>
+              <a:t>앞 절의 숫자들은 모두 </a:t>
+            </a:r>
+            <a:r>
+              <a:rPr sz="1400" b="1" i="0">
+                <a:solidFill>
+                  <a:srgbClr val="11202B"/>
+                </a:solidFill>
+                <a:latin typeface="Malgun Gothic"/>
+                <a:ea typeface="Malgun Gothic"/>
+                <a:cs typeface="Malgun Gothic"/>
+              </a:rPr>
+              <a:t>측정해서 얻은 것</a:t>
+            </a:r>
+            <a:r>
+              <a:rPr sz="1400" b="0" i="0">
+                <a:solidFill>
+                  <a:srgbClr val="11202B"/>
+                </a:solidFill>
+                <a:latin typeface="Malgun Gothic"/>
+                <a:ea typeface="Malgun Gothic"/>
+                <a:cs typeface="Malgun Gothic"/>
+              </a:rPr>
+              <a:t>이다. 그런데 어떤 방법으로 재느냐에 따라 보이는 것이 달라진다. 한 염기의 변화를 보는 방법과 염색체 하나의 결실을 보는 방법은 서로 다르고, 한쪽으로는 다른 쪽을 볼 수 없다. 검사 결과를 해석하려면 이 한계를 먼저 알아야 한다.</a:t>
             </a:r>
           </a:p>
           <a:p>
@@ -6281,7 +6303,7 @@
               </a:spcAft>
             </a:pPr>
             <a:r>
-              <a:rPr sz="1600" b="1" i="0">
+              <a:rPr sz="1400" b="1" i="0">
                 <a:solidFill>
                   <a:srgbClr val="F2B705"/>
                 </a:solidFill>
@@ -6292,48 +6314,15 @@
               <a:t>•  </a:t>
             </a:r>
             <a:r>
-              <a:rPr sz="1600" b="1" i="0">
-                <a:solidFill>
-                  <a:srgbClr val="11202B"/>
-                </a:solidFill>
-                <a:latin typeface="Malgun Gothic"/>
-                <a:ea typeface="Malgun Gothic"/>
-                <a:cs typeface="Malgun Gothic"/>
-              </a:rPr>
-              <a:t>핵형 분석.</a:t>
-            </a:r>
-            <a:r>
-              <a:rPr sz="1600" b="0" i="0">
-                <a:solidFill>
-                  <a:srgbClr val="11202B"/>
-                </a:solidFill>
-                <a:latin typeface="Malgun Gothic"/>
-                <a:ea typeface="Malgun Gothic"/>
-                <a:cs typeface="Malgun Gothic"/>
-              </a:rPr>
-              <a:t> 분열 중기의 염색체를 염색해 현미경으로 본다. 해상도는 약 500만~1,000만 염기쌍이다. 염색체의 </a:t>
-            </a:r>
-            <a:r>
-              <a:rPr sz="1600" b="1" i="0">
-                <a:solidFill>
-                  <a:srgbClr val="11202B"/>
-                </a:solidFill>
-                <a:latin typeface="Malgun Gothic"/>
-                <a:ea typeface="Malgun Gothic"/>
-                <a:cs typeface="Malgun Gothic"/>
-              </a:rPr>
-              <a:t>수 이상과 큰 구조 이상</a:t>
-            </a:r>
-            <a:r>
-              <a:rPr sz="1600" b="0" i="0">
-                <a:solidFill>
-                  <a:srgbClr val="11202B"/>
-                </a:solidFill>
-                <a:latin typeface="Malgun Gothic"/>
-                <a:ea typeface="Malgun Gothic"/>
-                <a:cs typeface="Malgun Gothic"/>
-              </a:rPr>
-              <a:t>을 본다. 균형 전좌처럼 양이 변하지 않은 재배열도 볼 수 있다는 것이 고유한 장점이다.</a:t>
+              <a:rPr sz="1400" b="0" i="0">
+                <a:solidFill>
+                  <a:srgbClr val="11202B"/>
+                </a:solidFill>
+                <a:latin typeface="Malgun Gothic"/>
+                <a:ea typeface="Malgun Gothic"/>
+                <a:cs typeface="Malgun Gothic"/>
+              </a:rPr>
+              <a:t>유전학의 주장은 측정 기술의 해상도에 묶여 있다. 어떤 방법이 어떤 크기의 변화를 볼 수 있는지를 알아야 검사 결과를 해석할 수 있다.</a:t>
             </a:r>
           </a:p>
           <a:p>
@@ -6343,7 +6332,7 @@
               </a:spcAft>
             </a:pPr>
             <a:r>
-              <a:rPr sz="1600" b="1" i="0">
+              <a:rPr sz="1400" b="1" i="0">
                 <a:solidFill>
                   <a:srgbClr val="F2B705"/>
                 </a:solidFill>
@@ -6354,48 +6343,48 @@
               <a:t>•  </a:t>
             </a:r>
             <a:r>
-              <a:rPr sz="1600" b="1" i="0">
-                <a:solidFill>
-                  <a:srgbClr val="11202B"/>
-                </a:solidFill>
-                <a:latin typeface="Malgun Gothic"/>
-                <a:ea typeface="Malgun Gothic"/>
-                <a:cs typeface="Malgun Gothic"/>
-              </a:rPr>
-              <a:t>형광 제자리 부합법(FISH).</a:t>
-            </a:r>
-            <a:r>
-              <a:rPr sz="1600" b="0" i="0">
-                <a:solidFill>
-                  <a:srgbClr val="11202B"/>
-                </a:solidFill>
-                <a:latin typeface="Malgun Gothic"/>
-                <a:ea typeface="Malgun Gothic"/>
-                <a:cs typeface="Malgun Gothic"/>
-              </a:rPr>
-              <a:t> 특정 서열에 결합하는 형광 탐침을 쓴다. 핵형 분석보다 작은 결실과 중복을 볼 수 있지만, </a:t>
-            </a:r>
-            <a:r>
-              <a:rPr sz="1600" b="1" i="0">
-                <a:solidFill>
-                  <a:srgbClr val="11202B"/>
-                </a:solidFill>
-                <a:latin typeface="Malgun Gothic"/>
-                <a:ea typeface="Malgun Gothic"/>
-                <a:cs typeface="Malgun Gothic"/>
-              </a:rPr>
-              <a:t>찾을 곳을 미리 정해야 한다.</a:t>
-            </a:r>
-            <a:r>
-              <a:rPr sz="1600" b="0" i="0">
-                <a:solidFill>
-                  <a:srgbClr val="11202B"/>
-                </a:solidFill>
-                <a:latin typeface="Malgun Gothic"/>
-                <a:ea typeface="Malgun Gothic"/>
-                <a:cs typeface="Malgun Gothic"/>
-              </a:rPr>
-              <a:t> 의심되는 질환이 분명할 때 빠르게 확인하는 방법이다.</a:t>
+              <a:rPr sz="1400" b="1" i="0">
+                <a:solidFill>
+                  <a:srgbClr val="11202B"/>
+                </a:solidFill>
+                <a:latin typeface="Malgun Gothic"/>
+                <a:ea typeface="Malgun Gothic"/>
+                <a:cs typeface="Malgun Gothic"/>
+              </a:rPr>
+              <a:t>핵형 분석.</a:t>
+            </a:r>
+            <a:r>
+              <a:rPr sz="1400" b="0" i="0">
+                <a:solidFill>
+                  <a:srgbClr val="11202B"/>
+                </a:solidFill>
+                <a:latin typeface="Malgun Gothic"/>
+                <a:ea typeface="Malgun Gothic"/>
+                <a:cs typeface="Malgun Gothic"/>
+              </a:rPr>
+              <a:t> 분열 중기의 염색체를 염색해 현미경으로 본다. 해상도는 약 500만~1,000만 염기쌍이다. 염색체의 </a:t>
+            </a:r>
+            <a:r>
+              <a:rPr sz="1400" b="1" i="0">
+                <a:solidFill>
+                  <a:srgbClr val="11202B"/>
+                </a:solidFill>
+                <a:latin typeface="Malgun Gothic"/>
+                <a:ea typeface="Malgun Gothic"/>
+                <a:cs typeface="Malgun Gothic"/>
+              </a:rPr>
+              <a:t>수 이상과 큰 구조 이상</a:t>
+            </a:r>
+            <a:r>
+              <a:rPr sz="1400" b="0" i="0">
+                <a:solidFill>
+                  <a:srgbClr val="11202B"/>
+                </a:solidFill>
+                <a:latin typeface="Malgun Gothic"/>
+                <a:ea typeface="Malgun Gothic"/>
+                <a:cs typeface="Malgun Gothic"/>
+              </a:rPr>
+              <a:t>을 본다. 균형 전좌처럼 양이 변하지 않은 재배열도 볼 수 있다는 것이 고유한 장점이다.</a:t>
             </a:r>
           </a:p>
           <a:p>
@@ -6405,7 +6394,7 @@
               </a:spcAft>
             </a:pPr>
             <a:r>
-              <a:rPr sz="1600" b="1" i="0">
+              <a:rPr sz="1400" b="1" i="0">
                 <a:solidFill>
                   <a:srgbClr val="F2B705"/>
                 </a:solidFill>
@@ -6416,48 +6405,48 @@
               <a:t>•  </a:t>
             </a:r>
             <a:r>
-              <a:rPr sz="1600" b="1" i="0">
-                <a:solidFill>
-                  <a:srgbClr val="11202B"/>
-                </a:solidFill>
-                <a:latin typeface="Malgun Gothic"/>
-                <a:ea typeface="Malgun Gothic"/>
-                <a:cs typeface="Malgun Gothic"/>
-              </a:rPr>
-              <a:t>염색체 마이크로어레이.</a:t>
-            </a:r>
-            <a:r>
-              <a:rPr sz="1600" b="0" i="0">
-                <a:solidFill>
-                  <a:srgbClr val="11202B"/>
-                </a:solidFill>
-                <a:latin typeface="Malgun Gothic"/>
-                <a:ea typeface="Malgun Gothic"/>
-                <a:cs typeface="Malgun Gothic"/>
-              </a:rPr>
-              <a:t> 유전체 전체에서 복제수 변이를 찾는다. 해상도가 수만 염기쌍 수준으로 훨씬 높다. 다만 </a:t>
-            </a:r>
-            <a:r>
-              <a:rPr sz="1600" b="1" i="0">
-                <a:solidFill>
-                  <a:srgbClr val="11202B"/>
-                </a:solidFill>
-                <a:latin typeface="Malgun Gothic"/>
-                <a:ea typeface="Malgun Gothic"/>
-                <a:cs typeface="Malgun Gothic"/>
-              </a:rPr>
-              <a:t>양이 변하지 않은 균형 전좌와 역위는 보지 못한다.</a:t>
-            </a:r>
-            <a:r>
-              <a:rPr sz="1600" b="0" i="0">
-                <a:solidFill>
-                  <a:srgbClr val="11202B"/>
-                </a:solidFill>
-                <a:latin typeface="Malgun Gothic"/>
-                <a:ea typeface="Malgun Gothic"/>
-                <a:cs typeface="Malgun Gothic"/>
-              </a:rPr>
-              <a:t> 핵형 분석이 완전히 대체되지 않는 이유다.</a:t>
+              <a:rPr sz="1400" b="1" i="0">
+                <a:solidFill>
+                  <a:srgbClr val="11202B"/>
+                </a:solidFill>
+                <a:latin typeface="Malgun Gothic"/>
+                <a:ea typeface="Malgun Gothic"/>
+                <a:cs typeface="Malgun Gothic"/>
+              </a:rPr>
+              <a:t>형광 제자리 부합법(FISH).</a:t>
+            </a:r>
+            <a:r>
+              <a:rPr sz="1400" b="0" i="0">
+                <a:solidFill>
+                  <a:srgbClr val="11202B"/>
+                </a:solidFill>
+                <a:latin typeface="Malgun Gothic"/>
+                <a:ea typeface="Malgun Gothic"/>
+                <a:cs typeface="Malgun Gothic"/>
+              </a:rPr>
+              <a:t> 특정 서열에 결합하는 형광 탐침을 쓴다. 핵형 분석보다 작은 결실과 중복을 볼 수 있지만, </a:t>
+            </a:r>
+            <a:r>
+              <a:rPr sz="1400" b="1" i="0">
+                <a:solidFill>
+                  <a:srgbClr val="11202B"/>
+                </a:solidFill>
+                <a:latin typeface="Malgun Gothic"/>
+                <a:ea typeface="Malgun Gothic"/>
+                <a:cs typeface="Malgun Gothic"/>
+              </a:rPr>
+              <a:t>찾을 곳을 미리 정해야 한다.</a:t>
+            </a:r>
+            <a:r>
+              <a:rPr sz="1400" b="0" i="0">
+                <a:solidFill>
+                  <a:srgbClr val="11202B"/>
+                </a:solidFill>
+                <a:latin typeface="Malgun Gothic"/>
+                <a:ea typeface="Malgun Gothic"/>
+                <a:cs typeface="Malgun Gothic"/>
+              </a:rPr>
+              <a:t> 의심되는 질환이 분명할 때 빠르게 확인하는 방법이다.</a:t>
             </a:r>
           </a:p>
           <a:p>
@@ -6467,7 +6456,7 @@
               </a:spcAft>
             </a:pPr>
             <a:r>
-              <a:rPr sz="1600" b="1" i="0">
+              <a:rPr sz="1400" b="1" i="0">
                 <a:solidFill>
                   <a:srgbClr val="F2B705"/>
                 </a:solidFill>
@@ -6478,7 +6467,69 @@
               <a:t>•  </a:t>
             </a:r>
             <a:r>
-              <a:rPr sz="1600" b="1" i="0">
+              <a:rPr sz="1400" b="1" i="0">
+                <a:solidFill>
+                  <a:srgbClr val="11202B"/>
+                </a:solidFill>
+                <a:latin typeface="Malgun Gothic"/>
+                <a:ea typeface="Malgun Gothic"/>
+                <a:cs typeface="Malgun Gothic"/>
+              </a:rPr>
+              <a:t>염색체 마이크로어레이.</a:t>
+            </a:r>
+            <a:r>
+              <a:rPr sz="1400" b="0" i="0">
+                <a:solidFill>
+                  <a:srgbClr val="11202B"/>
+                </a:solidFill>
+                <a:latin typeface="Malgun Gothic"/>
+                <a:ea typeface="Malgun Gothic"/>
+                <a:cs typeface="Malgun Gothic"/>
+              </a:rPr>
+              <a:t> 유전체 전체에서 복제수 변이를 찾는다. 해상도가 수만 염기쌍 수준으로 훨씬 높다. 다만 </a:t>
+            </a:r>
+            <a:r>
+              <a:rPr sz="1400" b="1" i="0">
+                <a:solidFill>
+                  <a:srgbClr val="11202B"/>
+                </a:solidFill>
+                <a:latin typeface="Malgun Gothic"/>
+                <a:ea typeface="Malgun Gothic"/>
+                <a:cs typeface="Malgun Gothic"/>
+              </a:rPr>
+              <a:t>양이 변하지 않은 균형 전좌와 역위는 보지 못한다.</a:t>
+            </a:r>
+            <a:r>
+              <a:rPr sz="1400" b="0" i="0">
+                <a:solidFill>
+                  <a:srgbClr val="11202B"/>
+                </a:solidFill>
+                <a:latin typeface="Malgun Gothic"/>
+                <a:ea typeface="Malgun Gothic"/>
+                <a:cs typeface="Malgun Gothic"/>
+              </a:rPr>
+              <a:t> 핵형 분석이 완전히 대체되지 않는 이유다.</a:t>
+            </a:r>
+          </a:p>
+          <a:p>
+            <a:pPr>
+              <a:spcAft>
+                <a:spcPts val="900"/>
+              </a:spcAft>
+            </a:pPr>
+            <a:r>
+              <a:rPr sz="1400" b="1" i="0">
+                <a:solidFill>
+                  <a:srgbClr val="F2B705"/>
+                </a:solidFill>
+                <a:latin typeface="Malgun Gothic"/>
+                <a:ea typeface="Malgun Gothic"/>
+                <a:cs typeface="Malgun Gothic"/>
+              </a:rPr>
+              <a:t>•  </a:t>
+            </a:r>
+            <a:r>
+              <a:rPr sz="1400" b="1" i="0">
                 <a:solidFill>
                   <a:srgbClr val="11202B"/>
                 </a:solidFill>
@@ -6489,7 +6540,7 @@
               <a:t>염기서열 분석.</a:t>
             </a:r>
             <a:r>
-              <a:rPr sz="1600" b="0" i="0">
+              <a:rPr sz="1400" b="0" i="0">
                 <a:solidFill>
                   <a:srgbClr val="11202B"/>
                 </a:solidFill>
@@ -6500,7 +6551,7 @@
               <a:t> 염기 하나 수준의 해상도를 가진다. 범위에 따라 나뉜다. 한 유전자만 읽기도 하고, 관련 유전자 묶음을 읽기도 하며, 단백질을 암호화하는 구간 전체(</a:t>
             </a:r>
             <a:r>
-              <a:rPr sz="1600" b="1" i="0">
+              <a:rPr sz="1400" b="1" i="0">
                 <a:solidFill>
                   <a:srgbClr val="11202B"/>
                 </a:solidFill>
@@ -6511,7 +6562,7 @@
               <a:t>엑솜</a:t>
             </a:r>
             <a:r>
-              <a:rPr sz="1600" b="0" i="0">
+              <a:rPr sz="1400" b="0" i="0">
                 <a:solidFill>
                   <a:srgbClr val="11202B"/>
                 </a:solidFill>
@@ -6522,7 +6573,7 @@
               <a:t>)나 유전체 전체를 읽기도 한다. 범위가 넓을수록 찾을 가능성이 커지지만 </a:t>
             </a:r>
             <a:r>
-              <a:rPr sz="1600" b="1" i="0">
+              <a:rPr sz="1400" b="1" i="0">
                 <a:solidFill>
                   <a:srgbClr val="11202B"/>
                 </a:solidFill>
@@ -6533,7 +6584,7 @@
               <a:t>의미를 알 수 없는 변이</a:t>
             </a:r>
             <a:r>
-              <a:rPr sz="1600" b="0" i="0">
+              <a:rPr sz="1400" b="0" i="0">
                 <a:solidFill>
                   <a:srgbClr val="11202B"/>
                 </a:solidFill>
@@ -7986,6 +8037,57 @@
                 <a:ea typeface="Malgun Gothic"/>
                 <a:cs typeface="Malgun Gothic"/>
               </a:rPr>
+              <a:t>여기까지 다룬 형질은 모두 있거나 없거나로 갈리는 것이었다. 그런데 키나 혈압처럼 </a:t>
+            </a:r>
+            <a:r>
+              <a:rPr sz="1400" b="1" i="0">
+                <a:solidFill>
+                  <a:srgbClr val="11202B"/>
+                </a:solidFill>
+                <a:latin typeface="Malgun Gothic"/>
+                <a:ea typeface="Malgun Gothic"/>
+                <a:cs typeface="Malgun Gothic"/>
+              </a:rPr>
+              <a:t>연속적으로 퍼져 있는</a:t>
+            </a:r>
+            <a:r>
+              <a:rPr sz="1400" b="0" i="0">
+                <a:solidFill>
+                  <a:srgbClr val="11202B"/>
+                </a:solidFill>
+                <a:latin typeface="Malgun Gothic"/>
+                <a:ea typeface="Malgun Gothic"/>
+                <a:cs typeface="Malgun Gothic"/>
+              </a:rPr>
+              <a:t> 형질이 오히려 더 흔하다. 멘델의 규칙이 적용되지 않는 것처럼 보이지만, 사실은 같은 규칙이 여러 유전자에 동시에 적용된 결과다.</a:t>
+            </a:r>
+          </a:p>
+          <a:p>
+            <a:pPr>
+              <a:spcAft>
+                <a:spcPts val="900"/>
+              </a:spcAft>
+            </a:pPr>
+            <a:r>
+              <a:rPr sz="1400" b="1" i="0">
+                <a:solidFill>
+                  <a:srgbClr val="F2B705"/>
+                </a:solidFill>
+                <a:latin typeface="Malgun Gothic"/>
+                <a:ea typeface="Malgun Gothic"/>
+                <a:cs typeface="Malgun Gothic"/>
+              </a:rPr>
+              <a:t>•  </a:t>
+            </a:r>
+            <a:r>
+              <a:rPr sz="1400" b="0" i="0">
+                <a:solidFill>
+                  <a:srgbClr val="11202B"/>
+                </a:solidFill>
+                <a:latin typeface="Malgun Gothic"/>
+                <a:ea typeface="Malgun Gothic"/>
+                <a:cs typeface="Malgun Gothic"/>
+              </a:rPr>
               <a:t>키, 혈압, 혈당, 지능 같은 형질은 몇 개의 범주로 나뉘지 않고 </a:t>
             </a:r>
             <a:r>
@@ -8676,6 +8778,57 @@
                 <a:ea typeface="Malgun Gothic"/>
                 <a:cs typeface="Malgun Gothic"/>
               </a:rPr>
+              <a:t>앞 절에서 다인자 형질에 환경이 함께 작용한다고 했다. 그런데 "유전과 환경이 함께 작용한다"는 말은 너무 막연해서 아무것도 설명하지 않는다. 이 절은 그 막연한 말을 </a:t>
+            </a:r>
+            <a:r>
+              <a:rPr sz="1400" b="1" i="0">
+                <a:solidFill>
+                  <a:srgbClr val="11202B"/>
+                </a:solidFill>
+                <a:latin typeface="Malgun Gothic"/>
+                <a:ea typeface="Malgun Gothic"/>
+                <a:cs typeface="Malgun Gothic"/>
+              </a:rPr>
+              <a:t>구체적인 몇 가지 방식</a:t>
+            </a:r>
+            <a:r>
+              <a:rPr sz="1400" b="0" i="0">
+                <a:solidFill>
+                  <a:srgbClr val="11202B"/>
+                </a:solidFill>
+                <a:latin typeface="Malgun Gothic"/>
+                <a:ea typeface="Malgun Gothic"/>
+                <a:cs typeface="Malgun Gothic"/>
+              </a:rPr>
+              <a:t>으로 나눈다.</a:t>
+            </a:r>
+          </a:p>
+          <a:p>
+            <a:pPr>
+              <a:spcAft>
+                <a:spcPts val="900"/>
+              </a:spcAft>
+            </a:pPr>
+            <a:r>
+              <a:rPr sz="1400" b="1" i="0">
+                <a:solidFill>
+                  <a:srgbClr val="F2B705"/>
+                </a:solidFill>
+                <a:latin typeface="Malgun Gothic"/>
+                <a:ea typeface="Malgun Gothic"/>
+                <a:cs typeface="Malgun Gothic"/>
+              </a:rPr>
+              <a:t>•  </a:t>
+            </a:r>
+            <a:r>
+              <a:rPr sz="1400" b="0" i="0">
+                <a:solidFill>
+                  <a:srgbClr val="11202B"/>
+                </a:solidFill>
+                <a:latin typeface="Malgun Gothic"/>
+                <a:ea typeface="Malgun Gothic"/>
+                <a:cs typeface="Malgun Gothic"/>
+              </a:rPr>
               <a:t>"유전인가 환경인가"가 잘못 세워진 질문이라는 점은 M01-W03-L02에서 다루었다. 여기서는 둘이 </a:t>
             </a:r>
             <a:r>
@@ -9245,6 +9398,57 @@
                 <a:ea typeface="Malgun Gothic"/>
                 <a:cs typeface="Malgun Gothic"/>
               </a:rPr>
+              <a:t>지금까지는 한 가족, 한 개체를 단위로 보았다. 그런데 단위를 집단으로 바꾸면 전혀 다른 질문이 가능해진다. </a:t>
+            </a:r>
+            <a:r>
+              <a:rPr sz="1400" b="1" i="0">
+                <a:solidFill>
+                  <a:srgbClr val="11202B"/>
+                </a:solidFill>
+                <a:latin typeface="Malgun Gothic"/>
+                <a:ea typeface="Malgun Gothic"/>
+                <a:cs typeface="Malgun Gothic"/>
+              </a:rPr>
+              <a:t>어떤 대립유전자가 집단에 얼마나 있고, 그 비율이 세대를 거쳐 변하는가.</a:t>
+            </a:r>
+            <a:r>
+              <a:rPr sz="1400" b="0" i="0">
+                <a:solidFill>
+                  <a:srgbClr val="11202B"/>
+                </a:solidFill>
+                <a:latin typeface="Malgun Gothic"/>
+                <a:ea typeface="Malgun Gothic"/>
+                <a:cs typeface="Malgun Gothic"/>
+              </a:rPr>
+              <a:t> 이 질문은 보인자 빈도 계산과 유전 상담에서 그대로 쓰인다.</a:t>
+            </a:r>
+          </a:p>
+          <a:p>
+            <a:pPr>
+              <a:spcAft>
+                <a:spcPts val="900"/>
+              </a:spcAft>
+            </a:pPr>
+            <a:r>
+              <a:rPr sz="1400" b="1" i="0">
+                <a:solidFill>
+                  <a:srgbClr val="F2B705"/>
+                </a:solidFill>
+                <a:latin typeface="Malgun Gothic"/>
+                <a:ea typeface="Malgun Gothic"/>
+                <a:cs typeface="Malgun Gothic"/>
+              </a:rPr>
+              <a:t>•  </a:t>
+            </a:r>
+            <a:r>
+              <a:rPr sz="1400" b="0" i="0">
+                <a:solidFill>
+                  <a:srgbClr val="11202B"/>
+                </a:solidFill>
+                <a:latin typeface="Malgun Gothic"/>
+                <a:ea typeface="Malgun Gothic"/>
+                <a:cs typeface="Malgun Gothic"/>
+              </a:rPr>
               <a:t>개체가 아니라 집단을 단위로 보면 다른 질문이 가능해진다. </a:t>
             </a:r>
             <a:r>
@@ -10428,6 +10632,35 @@
                 <a:ea typeface="Malgun Gothic"/>
                 <a:cs typeface="Malgun Gothic"/>
               </a:rPr>
+              <a:t>여기까지 세운 모든 것이 임상에서 하나의 작업으로 모인다. 가계도를 보고 유전 양식을 추정하고, 그 양식과 집단 빈도를 써서 다음 자녀의 위험을 숫자로 내는 일이다. 이 절은 그 작업을 단계로 나눈다.</a:t>
+            </a:r>
+          </a:p>
+          <a:p>
+            <a:pPr>
+              <a:spcAft>
+                <a:spcPts val="900"/>
+              </a:spcAft>
+            </a:pPr>
+            <a:r>
+              <a:rPr sz="1400" b="1" i="0">
+                <a:solidFill>
+                  <a:srgbClr val="F2B705"/>
+                </a:solidFill>
+                <a:latin typeface="Malgun Gothic"/>
+                <a:ea typeface="Malgun Gothic"/>
+                <a:cs typeface="Malgun Gothic"/>
+              </a:rPr>
+              <a:t>•  </a:t>
+            </a:r>
+            <a:r>
+              <a:rPr sz="1400" b="0" i="0">
+                <a:solidFill>
+                  <a:srgbClr val="11202B"/>
+                </a:solidFill>
+                <a:latin typeface="Malgun Gothic"/>
+                <a:ea typeface="Malgun Gothic"/>
+                <a:cs typeface="Malgun Gothic"/>
+              </a:rPr>
               <a:t>임상에서 유전 상담은 세 단계로 진행한다.</a:t>
             </a:r>
           </a:p>
@@ -11911,7 +12144,7 @@
               </a:spcAft>
             </a:pPr>
             <a:r>
-              <a:rPr sz="1600" b="1" i="0">
+              <a:rPr sz="1400" b="1" i="0">
                 <a:solidFill>
                   <a:srgbClr val="F2B705"/>
                 </a:solidFill>
@@ -11922,7 +12155,7 @@
               <a:t>•  </a:t>
             </a:r>
             <a:r>
-              <a:rPr sz="1600" b="0" i="0">
+              <a:rPr sz="1400" b="0" i="0">
                 <a:solidFill>
                   <a:srgbClr val="11202B"/>
                 </a:solidFill>
@@ -11933,7 +12166,7 @@
               <a:t>이 수업은 유전의 </a:t>
             </a:r>
             <a:r>
-              <a:rPr sz="1600" b="1" i="0">
+              <a:rPr sz="1400" b="1" i="0">
                 <a:solidFill>
                   <a:srgbClr val="11202B"/>
                 </a:solidFill>
@@ -11944,15 +12177,15 @@
               <a:t>규칙과 사슬</a:t>
             </a:r>
             <a:r>
-              <a:rPr sz="1600" b="0" i="0">
-                <a:solidFill>
-                  <a:srgbClr val="11202B"/>
-                </a:solidFill>
-                <a:latin typeface="Malgun Gothic"/>
-                <a:ea typeface="Malgun Gothic"/>
-                <a:cs typeface="Malgun Gothic"/>
-              </a:rPr>
-              <a:t>을 세우는 것이 목적이다. 분자 수준의 기전은 모듈 3이 다룬다.</a:t>
+              <a:rPr sz="1400" b="0" i="0">
+                <a:solidFill>
+                  <a:srgbClr val="11202B"/>
+                </a:solidFill>
+                <a:latin typeface="Malgun Gothic"/>
+                <a:ea typeface="Malgun Gothic"/>
+                <a:cs typeface="Malgun Gothic"/>
+              </a:rPr>
+              <a:t>을 세우는 것이 목적이었다. 분자 수준에서 실제로 어떤 일이 일어나는지는 뒤의 모듈이 맡는다. 마지막으로 여기서 세운 틀이 어디로 이어지는지를 확인해 둔다.</a:t>
             </a:r>
           </a:p>
           <a:p>
@@ -11962,7 +12195,7 @@
               </a:spcAft>
             </a:pPr>
             <a:r>
-              <a:rPr sz="1600" b="1" i="0">
+              <a:rPr sz="1400" b="1" i="0">
                 <a:solidFill>
                   <a:srgbClr val="F2B705"/>
                 </a:solidFill>
@@ -11973,26 +12206,37 @@
               <a:t>•  </a:t>
             </a:r>
             <a:r>
-              <a:rPr sz="1600" b="1" i="0">
-                <a:solidFill>
-                  <a:srgbClr val="11202B"/>
-                </a:solidFill>
-                <a:latin typeface="Malgun Gothic"/>
-                <a:ea typeface="Malgun Gothic"/>
-                <a:cs typeface="Malgun Gothic"/>
-              </a:rPr>
-              <a:t>DNA의 구조와 염색질 포장</a:t>
-            </a:r>
-            <a:r>
-              <a:rPr sz="1600" b="0" i="0">
-                <a:solidFill>
-                  <a:srgbClr val="11202B"/>
-                </a:solidFill>
-                <a:latin typeface="Malgun Gothic"/>
-                <a:ea typeface="Malgun Gothic"/>
-                <a:cs typeface="Malgun Gothic"/>
-              </a:rPr>
-              <a:t>: M03-W01-L01. 복제의 기전은 M01-W06-L03과 M03-W01-L02.</a:t>
+              <a:rPr sz="1400" b="0" i="0">
+                <a:solidFill>
+                  <a:srgbClr val="11202B"/>
+                </a:solidFill>
+                <a:latin typeface="Malgun Gothic"/>
+                <a:ea typeface="Malgun Gothic"/>
+                <a:cs typeface="Malgun Gothic"/>
+              </a:rPr>
+              <a:t>이 수업은 유전의 </a:t>
+            </a:r>
+            <a:r>
+              <a:rPr sz="1400" b="1" i="0">
+                <a:solidFill>
+                  <a:srgbClr val="11202B"/>
+                </a:solidFill>
+                <a:latin typeface="Malgun Gothic"/>
+                <a:ea typeface="Malgun Gothic"/>
+                <a:cs typeface="Malgun Gothic"/>
+              </a:rPr>
+              <a:t>규칙과 사슬</a:t>
+            </a:r>
+            <a:r>
+              <a:rPr sz="1400" b="0" i="0">
+                <a:solidFill>
+                  <a:srgbClr val="11202B"/>
+                </a:solidFill>
+                <a:latin typeface="Malgun Gothic"/>
+                <a:ea typeface="Malgun Gothic"/>
+                <a:cs typeface="Malgun Gothic"/>
+              </a:rPr>
+              <a:t>을 세우는 것이 목적이다. 분자 수준의 기전은 모듈 3이 다룬다.</a:t>
             </a:r>
           </a:p>
           <a:p>
@@ -12002,7 +12246,7 @@
               </a:spcAft>
             </a:pPr>
             <a:r>
-              <a:rPr sz="1600" b="1" i="0">
+              <a:rPr sz="1400" b="1" i="0">
                 <a:solidFill>
                   <a:srgbClr val="F2B705"/>
                 </a:solidFill>
@@ -12013,26 +12257,26 @@
               <a:t>•  </a:t>
             </a:r>
             <a:r>
-              <a:rPr sz="1600" b="1" i="0">
-                <a:solidFill>
-                  <a:srgbClr val="11202B"/>
-                </a:solidFill>
-                <a:latin typeface="Malgun Gothic"/>
-                <a:ea typeface="Malgun Gothic"/>
-                <a:cs typeface="Malgun Gothic"/>
-              </a:rPr>
-              <a:t>DNA 손상과 복구, 복구 결함 질환</a:t>
-            </a:r>
-            <a:r>
-              <a:rPr sz="1600" b="0" i="0">
-                <a:solidFill>
-                  <a:srgbClr val="11202B"/>
-                </a:solidFill>
-                <a:latin typeface="Malgun Gothic"/>
-                <a:ea typeface="Malgun Gothic"/>
-                <a:cs typeface="Malgun Gothic"/>
-              </a:rPr>
-              <a:t>: M03-W01-L03과 M03-W02-L01. 변이가 왜 생기고 왜 대부분 교정되는지가 여기서 설명된다.</a:t>
+              <a:rPr sz="1400" b="1" i="0">
+                <a:solidFill>
+                  <a:srgbClr val="11202B"/>
+                </a:solidFill>
+                <a:latin typeface="Malgun Gothic"/>
+                <a:ea typeface="Malgun Gothic"/>
+                <a:cs typeface="Malgun Gothic"/>
+              </a:rPr>
+              <a:t>DNA의 구조와 염색질 포장</a:t>
+            </a:r>
+            <a:r>
+              <a:rPr sz="1400" b="0" i="0">
+                <a:solidFill>
+                  <a:srgbClr val="11202B"/>
+                </a:solidFill>
+                <a:latin typeface="Malgun Gothic"/>
+                <a:ea typeface="Malgun Gothic"/>
+                <a:cs typeface="Malgun Gothic"/>
+              </a:rPr>
+              <a:t>: M03-W01-L01. 복제의 기전은 M01-W06-L03과 M03-W01-L02.</a:t>
             </a:r>
           </a:p>
           <a:p>
@@ -12042,7 +12286,7 @@
               </a:spcAft>
             </a:pPr>
             <a:r>
-              <a:rPr sz="1600" b="1" i="0">
+              <a:rPr sz="1400" b="1" i="0">
                 <a:solidFill>
                   <a:srgbClr val="F2B705"/>
                 </a:solidFill>
@@ -12053,26 +12297,26 @@
               <a:t>•  </a:t>
             </a:r>
             <a:r>
-              <a:rPr sz="1600" b="1" i="0">
-                <a:solidFill>
-                  <a:srgbClr val="11202B"/>
-                </a:solidFill>
-                <a:latin typeface="Malgun Gothic"/>
-                <a:ea typeface="Malgun Gothic"/>
-                <a:cs typeface="Malgun Gothic"/>
-              </a:rPr>
-              <a:t>전사와 번역의 기전</a:t>
-            </a:r>
-            <a:r>
-              <a:rPr sz="1600" b="0" i="0">
-                <a:solidFill>
-                  <a:srgbClr val="11202B"/>
-                </a:solidFill>
-                <a:latin typeface="Malgun Gothic"/>
-                <a:ea typeface="Malgun Gothic"/>
-                <a:cs typeface="Malgun Gothic"/>
-              </a:rPr>
-              <a:t>: M01-W05-L03에서 개요를, M01-W07-L01과 M01-W07-L03에서 상세를 다룬다.</a:t>
+              <a:rPr sz="1400" b="1" i="0">
+                <a:solidFill>
+                  <a:srgbClr val="11202B"/>
+                </a:solidFill>
+                <a:latin typeface="Malgun Gothic"/>
+                <a:ea typeface="Malgun Gothic"/>
+                <a:cs typeface="Malgun Gothic"/>
+              </a:rPr>
+              <a:t>DNA 손상과 복구, 복구 결함 질환</a:t>
+            </a:r>
+            <a:r>
+              <a:rPr sz="1400" b="0" i="0">
+                <a:solidFill>
+                  <a:srgbClr val="11202B"/>
+                </a:solidFill>
+                <a:latin typeface="Malgun Gothic"/>
+                <a:ea typeface="Malgun Gothic"/>
+                <a:cs typeface="Malgun Gothic"/>
+              </a:rPr>
+              <a:t>: M03-W01-L03과 M03-W02-L01. 변이가 왜 생기고 왜 대부분 교정되는지가 여기서 설명된다.</a:t>
             </a:r>
           </a:p>
           <a:p>
@@ -12082,7 +12326,7 @@
               </a:spcAft>
             </a:pPr>
             <a:r>
-              <a:rPr sz="1600" b="1" i="0">
+              <a:rPr sz="1400" b="1" i="0">
                 <a:solidFill>
                   <a:srgbClr val="F2B705"/>
                 </a:solidFill>
@@ -12093,26 +12337,26 @@
               <a:t>•  </a:t>
             </a:r>
             <a:r>
-              <a:rPr sz="1600" b="1" i="0">
-                <a:solidFill>
-                  <a:srgbClr val="11202B"/>
-                </a:solidFill>
-                <a:latin typeface="Malgun Gothic"/>
-                <a:ea typeface="Malgun Gothic"/>
-                <a:cs typeface="Malgun Gothic"/>
-              </a:rPr>
-              <a:t>대체 splicing과 한 유전자 여러 산물</a:t>
-            </a:r>
-            <a:r>
-              <a:rPr sz="1600" b="0" i="0">
-                <a:solidFill>
-                  <a:srgbClr val="11202B"/>
-                </a:solidFill>
-                <a:latin typeface="Malgun Gothic"/>
-                <a:ea typeface="Malgun Gothic"/>
-                <a:cs typeface="Malgun Gothic"/>
-              </a:rPr>
-              <a:t>: M03-W02-L03.</a:t>
+              <a:rPr sz="1400" b="1" i="0">
+                <a:solidFill>
+                  <a:srgbClr val="11202B"/>
+                </a:solidFill>
+                <a:latin typeface="Malgun Gothic"/>
+                <a:ea typeface="Malgun Gothic"/>
+                <a:cs typeface="Malgun Gothic"/>
+              </a:rPr>
+              <a:t>전사와 번역의 기전</a:t>
+            </a:r>
+            <a:r>
+              <a:rPr sz="1400" b="0" i="0">
+                <a:solidFill>
+                  <a:srgbClr val="11202B"/>
+                </a:solidFill>
+                <a:latin typeface="Malgun Gothic"/>
+                <a:ea typeface="Malgun Gothic"/>
+                <a:cs typeface="Malgun Gothic"/>
+              </a:rPr>
+              <a:t>: M01-W05-L03에서 개요를, M01-W07-L01과 M01-W07-L03에서 상세를 다룬다.</a:t>
             </a:r>
           </a:p>
           <a:p>
@@ -12122,7 +12366,7 @@
               </a:spcAft>
             </a:pPr>
             <a:r>
-              <a:rPr sz="1600" b="1" i="0">
+              <a:rPr sz="1400" b="1" i="0">
                 <a:solidFill>
                   <a:srgbClr val="F2B705"/>
                 </a:solidFill>
@@ -12133,26 +12377,26 @@
               <a:t>•  </a:t>
             </a:r>
             <a:r>
-              <a:rPr sz="1600" b="1" i="0">
-                <a:solidFill>
-                  <a:srgbClr val="11202B"/>
-                </a:solidFill>
-                <a:latin typeface="Malgun Gothic"/>
-                <a:ea typeface="Malgun Gothic"/>
-                <a:cs typeface="Malgun Gothic"/>
-              </a:rPr>
-              <a:t>유전자 발현 조절과 전사인자</a:t>
-            </a:r>
-            <a:r>
-              <a:rPr sz="1600" b="0" i="0">
-                <a:solidFill>
-                  <a:srgbClr val="11202B"/>
-                </a:solidFill>
-                <a:latin typeface="Malgun Gothic"/>
-                <a:ea typeface="Malgun Gothic"/>
-                <a:cs typeface="Malgun Gothic"/>
-              </a:rPr>
-              <a:t>: M01-W07-L02, M03-W04-L02, M03-W04-L03.</a:t>
+              <a:rPr sz="1400" b="1" i="0">
+                <a:solidFill>
+                  <a:srgbClr val="11202B"/>
+                </a:solidFill>
+                <a:latin typeface="Malgun Gothic"/>
+                <a:ea typeface="Malgun Gothic"/>
+                <a:cs typeface="Malgun Gothic"/>
+              </a:rPr>
+              <a:t>대체 splicing과 한 유전자 여러 산물</a:t>
+            </a:r>
+            <a:r>
+              <a:rPr sz="1400" b="0" i="0">
+                <a:solidFill>
+                  <a:srgbClr val="11202B"/>
+                </a:solidFill>
+                <a:latin typeface="Malgun Gothic"/>
+                <a:ea typeface="Malgun Gothic"/>
+                <a:cs typeface="Malgun Gothic"/>
+              </a:rPr>
+              <a:t>: M03-W02-L03.</a:t>
             </a:r>
           </a:p>
           <a:p>
@@ -12162,7 +12406,7 @@
               </a:spcAft>
             </a:pPr>
             <a:r>
-              <a:rPr sz="1600" b="1" i="0">
+              <a:rPr sz="1400" b="1" i="0">
                 <a:solidFill>
                   <a:srgbClr val="F2B705"/>
                 </a:solidFill>
@@ -12173,26 +12417,26 @@
               <a:t>•  </a:t>
             </a:r>
             <a:r>
-              <a:rPr sz="1600" b="1" i="0">
-                <a:solidFill>
-                  <a:srgbClr val="11202B"/>
-                </a:solidFill>
-                <a:latin typeface="Malgun Gothic"/>
-                <a:ea typeface="Malgun Gothic"/>
-                <a:cs typeface="Malgun Gothic"/>
-              </a:rPr>
-              <a:t>각인과 X 불활성화의 분자 기전</a:t>
-            </a:r>
-            <a:r>
-              <a:rPr sz="1600" b="0" i="0">
-                <a:solidFill>
-                  <a:srgbClr val="11202B"/>
-                </a:solidFill>
-                <a:latin typeface="Malgun Gothic"/>
-                <a:ea typeface="Malgun Gothic"/>
-                <a:cs typeface="Malgun Gothic"/>
-              </a:rPr>
-              <a:t>: M03-W05-L01.</a:t>
+              <a:rPr sz="1400" b="1" i="0">
+                <a:solidFill>
+                  <a:srgbClr val="11202B"/>
+                </a:solidFill>
+                <a:latin typeface="Malgun Gothic"/>
+                <a:ea typeface="Malgun Gothic"/>
+                <a:cs typeface="Malgun Gothic"/>
+              </a:rPr>
+              <a:t>유전자 발현 조절과 전사인자</a:t>
+            </a:r>
+            <a:r>
+              <a:rPr sz="1400" b="0" i="0">
+                <a:solidFill>
+                  <a:srgbClr val="11202B"/>
+                </a:solidFill>
+                <a:latin typeface="Malgun Gothic"/>
+                <a:ea typeface="Malgun Gothic"/>
+                <a:cs typeface="Malgun Gothic"/>
+              </a:rPr>
+              <a:t>: M01-W07-L02, M03-W04-L02, M03-W04-L03.</a:t>
             </a:r>
           </a:p>
           <a:p>
@@ -12202,7 +12446,7 @@
               </a:spcAft>
             </a:pPr>
             <a:r>
-              <a:rPr sz="1600" b="1" i="0">
+              <a:rPr sz="1400" b="1" i="0">
                 <a:solidFill>
                   <a:srgbClr val="F2B705"/>
                 </a:solidFill>
@@ -12213,26 +12457,26 @@
               <a:t>•  </a:t>
             </a:r>
             <a:r>
-              <a:rPr sz="1600" b="1" i="0">
-                <a:solidFill>
-                  <a:srgbClr val="11202B"/>
-                </a:solidFill>
-                <a:latin typeface="Malgun Gothic"/>
-                <a:ea typeface="Malgun Gothic"/>
-                <a:cs typeface="Malgun Gothic"/>
-              </a:rPr>
-              <a:t>유전체의 구성과 반복 서열</a:t>
-            </a:r>
-            <a:r>
-              <a:rPr sz="1600" b="0" i="0">
-                <a:solidFill>
-                  <a:srgbClr val="11202B"/>
-                </a:solidFill>
-                <a:latin typeface="Malgun Gothic"/>
-                <a:ea typeface="Malgun Gothic"/>
-                <a:cs typeface="Malgun Gothic"/>
-              </a:rPr>
-              <a:t>: M01-W06-L02.</a:t>
+              <a:rPr sz="1400" b="1" i="0">
+                <a:solidFill>
+                  <a:srgbClr val="11202B"/>
+                </a:solidFill>
+                <a:latin typeface="Malgun Gothic"/>
+                <a:ea typeface="Malgun Gothic"/>
+                <a:cs typeface="Malgun Gothic"/>
+              </a:rPr>
+              <a:t>각인과 X 불활성화의 분자 기전</a:t>
+            </a:r>
+            <a:r>
+              <a:rPr sz="1400" b="0" i="0">
+                <a:solidFill>
+                  <a:srgbClr val="11202B"/>
+                </a:solidFill>
+                <a:latin typeface="Malgun Gothic"/>
+                <a:ea typeface="Malgun Gothic"/>
+                <a:cs typeface="Malgun Gothic"/>
+              </a:rPr>
+              <a:t>: M03-W05-L01.</a:t>
             </a:r>
           </a:p>
           <a:p>
@@ -12242,7 +12486,7 @@
               </a:spcAft>
             </a:pPr>
             <a:r>
-              <a:rPr sz="1600" b="1" i="0">
+              <a:rPr sz="1400" b="1" i="0">
                 <a:solidFill>
                   <a:srgbClr val="F2B705"/>
                 </a:solidFill>
@@ -12253,26 +12497,26 @@
               <a:t>•  </a:t>
             </a:r>
             <a:r>
-              <a:rPr sz="1600" b="1" i="0">
-                <a:solidFill>
-                  <a:srgbClr val="11202B"/>
-                </a:solidFill>
-                <a:latin typeface="Malgun Gothic"/>
-                <a:ea typeface="Malgun Gothic"/>
-                <a:cs typeface="Malgun Gothic"/>
-              </a:rPr>
-              <a:t>유전자 진단과 염기서열 분석</a:t>
-            </a:r>
-            <a:r>
-              <a:rPr sz="1600" b="0" i="0">
-                <a:solidFill>
-                  <a:srgbClr val="11202B"/>
-                </a:solidFill>
-                <a:latin typeface="Malgun Gothic"/>
-                <a:ea typeface="Malgun Gothic"/>
-                <a:cs typeface="Malgun Gothic"/>
-              </a:rPr>
-              <a:t>: M03-W06-L01. 유전자 치료와 유전체 편집은 M03-W06-L02.</a:t>
+              <a:rPr sz="1400" b="1" i="0">
+                <a:solidFill>
+                  <a:srgbClr val="11202B"/>
+                </a:solidFill>
+                <a:latin typeface="Malgun Gothic"/>
+                <a:ea typeface="Malgun Gothic"/>
+                <a:cs typeface="Malgun Gothic"/>
+              </a:rPr>
+              <a:t>유전체의 구성과 반복 서열</a:t>
+            </a:r>
+            <a:r>
+              <a:rPr sz="1400" b="0" i="0">
+                <a:solidFill>
+                  <a:srgbClr val="11202B"/>
+                </a:solidFill>
+                <a:latin typeface="Malgun Gothic"/>
+                <a:ea typeface="Malgun Gothic"/>
+                <a:cs typeface="Malgun Gothic"/>
+              </a:rPr>
+              <a:t>: M01-W06-L02.</a:t>
             </a:r>
           </a:p>
           <a:p>
@@ -12282,7 +12526,7 @@
               </a:spcAft>
             </a:pPr>
             <a:r>
-              <a:rPr sz="1600" b="1" i="0">
+              <a:rPr sz="1400" b="1" i="0">
                 <a:solidFill>
                   <a:srgbClr val="F2B705"/>
                 </a:solidFill>
@@ -12293,26 +12537,26 @@
               <a:t>•  </a:t>
             </a:r>
             <a:r>
-              <a:rPr sz="1600" b="1" i="0">
-                <a:solidFill>
-                  <a:srgbClr val="11202B"/>
-                </a:solidFill>
-                <a:latin typeface="Malgun Gothic"/>
-                <a:ea typeface="Malgun Gothic"/>
-                <a:cs typeface="Malgun Gothic"/>
-              </a:rPr>
-              <a:t>감수분열과 염색체 이상</a:t>
-            </a:r>
-            <a:r>
-              <a:rPr sz="1600" b="0" i="0">
-                <a:solidFill>
-                  <a:srgbClr val="11202B"/>
-                </a:solidFill>
-                <a:latin typeface="Malgun Gothic"/>
-                <a:ea typeface="Malgun Gothic"/>
-                <a:cs typeface="Malgun Gothic"/>
-              </a:rPr>
-              <a:t>: M01-W02-L03에서 다루었다.</a:t>
+              <a:rPr sz="1400" b="1" i="0">
+                <a:solidFill>
+                  <a:srgbClr val="11202B"/>
+                </a:solidFill>
+                <a:latin typeface="Malgun Gothic"/>
+                <a:ea typeface="Malgun Gothic"/>
+                <a:cs typeface="Malgun Gothic"/>
+              </a:rPr>
+              <a:t>유전자 진단과 염기서열 분석</a:t>
+            </a:r>
+            <a:r>
+              <a:rPr sz="1400" b="0" i="0">
+                <a:solidFill>
+                  <a:srgbClr val="11202B"/>
+                </a:solidFill>
+                <a:latin typeface="Malgun Gothic"/>
+                <a:ea typeface="Malgun Gothic"/>
+                <a:cs typeface="Malgun Gothic"/>
+              </a:rPr>
+              <a:t>: M03-W06-L01. 유전자 치료와 유전체 편집은 M03-W06-L02.</a:t>
             </a:r>
           </a:p>
           <a:p>
@@ -12322,7 +12566,7 @@
               </a:spcAft>
             </a:pPr>
             <a:r>
-              <a:rPr sz="1600" b="1" i="0">
+              <a:rPr sz="1400" b="1" i="0">
                 <a:solidFill>
                   <a:srgbClr val="F2B705"/>
                 </a:solidFill>
@@ -12333,7 +12577,47 @@
               <a:t>•  </a:t>
             </a:r>
             <a:r>
-              <a:rPr sz="1600" b="1" i="0">
+              <a:rPr sz="1400" b="1" i="0">
+                <a:solidFill>
+                  <a:srgbClr val="11202B"/>
+                </a:solidFill>
+                <a:latin typeface="Malgun Gothic"/>
+                <a:ea typeface="Malgun Gothic"/>
+                <a:cs typeface="Malgun Gothic"/>
+              </a:rPr>
+              <a:t>감수분열과 염색체 이상</a:t>
+            </a:r>
+            <a:r>
+              <a:rPr sz="1400" b="0" i="0">
+                <a:solidFill>
+                  <a:srgbClr val="11202B"/>
+                </a:solidFill>
+                <a:latin typeface="Malgun Gothic"/>
+                <a:ea typeface="Malgun Gothic"/>
+                <a:cs typeface="Malgun Gothic"/>
+              </a:rPr>
+              <a:t>: M01-W02-L03에서 다루었다.</a:t>
+            </a:r>
+          </a:p>
+          <a:p>
+            <a:pPr>
+              <a:spcAft>
+                <a:spcPts val="900"/>
+              </a:spcAft>
+            </a:pPr>
+            <a:r>
+              <a:rPr sz="1400" b="1" i="0">
+                <a:solidFill>
+                  <a:srgbClr val="F2B705"/>
+                </a:solidFill>
+                <a:latin typeface="Malgun Gothic"/>
+                <a:ea typeface="Malgun Gothic"/>
+                <a:cs typeface="Malgun Gothic"/>
+              </a:rPr>
+              <a:t>•  </a:t>
+            </a:r>
+            <a:r>
+              <a:rPr sz="1400" b="1" i="0">
                 <a:solidFill>
                   <a:srgbClr val="11202B"/>
                 </a:solidFill>
@@ -12344,7 +12628,7 @@
               <a:t>다인자 형질의 대사적 배경</a:t>
             </a:r>
             <a:r>
-              <a:rPr sz="1600" b="0" i="0">
+              <a:rPr sz="1400" b="0" i="0">
                 <a:solidFill>
                   <a:srgbClr val="11202B"/>
                 </a:solidFill>
@@ -22354,6 +22638,57 @@
             <a:spAutoFit/>
           </a:bodyPr>
           <a:lstStyle/>
+          <a:p>
+            <a:pPr>
+              <a:spcAft>
+                <a:spcPts val="900"/>
+              </a:spcAft>
+            </a:pPr>
+            <a:r>
+              <a:rPr sz="2000" b="1" i="0">
+                <a:solidFill>
+                  <a:srgbClr val="F2B705"/>
+                </a:solidFill>
+                <a:latin typeface="Malgun Gothic"/>
+                <a:ea typeface="Malgun Gothic"/>
+                <a:cs typeface="Malgun Gothic"/>
+              </a:rPr>
+              <a:t>•  </a:t>
+            </a:r>
+            <a:r>
+              <a:rPr sz="2000" b="0" i="0">
+                <a:solidFill>
+                  <a:srgbClr val="11202B"/>
+                </a:solidFill>
+                <a:latin typeface="Malgun Gothic"/>
+                <a:ea typeface="Malgun Gothic"/>
+                <a:cs typeface="Malgun Gothic"/>
+              </a:rPr>
+              <a:t>앞 절에서 변이가 어디서 오는지를 보았다. 이제 생긴 변이가 </a:t>
+            </a:r>
+            <a:r>
+              <a:rPr sz="2000" b="1" i="0">
+                <a:solidFill>
+                  <a:srgbClr val="11202B"/>
+                </a:solidFill>
+                <a:latin typeface="Malgun Gothic"/>
+                <a:ea typeface="Malgun Gothic"/>
+                <a:cs typeface="Malgun Gothic"/>
+              </a:rPr>
+              <a:t>무엇을 바꾸는지</a:t>
+            </a:r>
+            <a:r>
+              <a:rPr sz="2000" b="0" i="0">
+                <a:solidFill>
+                  <a:srgbClr val="11202B"/>
+                </a:solidFill>
+                <a:latin typeface="Malgun Gothic"/>
+                <a:ea typeface="Malgun Gothic"/>
+                <a:cs typeface="Malgun Gothic"/>
+              </a:rPr>
+              <a:t>로 넘어간다. 종류가 많아 보이지만 크기를 기준으로 줄을 세우면 결과를 예측할 수 있다. 한 염기가 바뀐 것과 염색체 하나가 통째로 더 있는 것은 영향의 규모가 전혀 다르기 때문이다.</a:t>
+            </a:r>
+          </a:p>
           <a:p>
             <a:pPr>
               <a:spcAft>
@@ -23934,6 +24269,57 @@
             <a:spAutoFit/>
           </a:bodyPr>
           <a:lstStyle/>
+          <a:p>
+            <a:pPr>
+              <a:spcAft>
+                <a:spcPts val="900"/>
+              </a:spcAft>
+            </a:pPr>
+            <a:r>
+              <a:rPr sz="2000" b="1" i="0">
+                <a:solidFill>
+                  <a:srgbClr val="F2B705"/>
+                </a:solidFill>
+                <a:latin typeface="Malgun Gothic"/>
+                <a:ea typeface="Malgun Gothic"/>
+                <a:cs typeface="Malgun Gothic"/>
+              </a:rPr>
+              <a:t>•  </a:t>
+            </a:r>
+            <a:r>
+              <a:rPr sz="2000" b="0" i="0">
+                <a:solidFill>
+                  <a:srgbClr val="11202B"/>
+                </a:solidFill>
+                <a:latin typeface="Malgun Gothic"/>
+                <a:ea typeface="Malgun Gothic"/>
+                <a:cs typeface="Malgun Gothic"/>
+              </a:rPr>
+              <a:t>앞의 두 절에서 변이를 다루었다. 그런데 "유전자 하나에 변이가 생겼다"는 말이 전체에서 얼마만 한 사건인지는 아직 감이 잡히지 않는다. 그 감을 잡으려면 </a:t>
+            </a:r>
+            <a:r>
+              <a:rPr sz="2000" b="1" i="0">
+                <a:solidFill>
+                  <a:srgbClr val="11202B"/>
+                </a:solidFill>
+                <a:latin typeface="Malgun Gothic"/>
+                <a:ea typeface="Malgun Gothic"/>
+                <a:cs typeface="Malgun Gothic"/>
+              </a:rPr>
+              <a:t>유전체 전체가 어떻게 생겼는지</a:t>
+            </a:r>
+            <a:r>
+              <a:rPr sz="2000" b="0" i="0">
+                <a:solidFill>
+                  <a:srgbClr val="11202B"/>
+                </a:solidFill>
+                <a:latin typeface="Malgun Gothic"/>
+                <a:ea typeface="Malgun Gothic"/>
+                <a:cs typeface="Malgun Gothic"/>
+              </a:rPr>
+              <a:t>를 먼저 알아야 한다. 이 절은 그 전체 그림을 숫자로 제시한다.</a:t>
+            </a:r>
+          </a:p>
           <a:p>
             <a:pPr>
               <a:spcAft>
